--- a/waqf/Stopping-Waqf.pptx
+++ b/waqf/Stopping-Waqf.pptx
@@ -5355,7 +5355,7 @@
         </p:nvSpPr>
         <p:spPr>
           <a:xfrm>
-            <a:off x="365760" y="1569966"/>
+            <a:off x="365760" y="1590675"/>
             <a:ext cx="8412480" cy="1417320"/>
           </a:xfrm>
           <a:prstGeom prst="rect">
@@ -5372,7 +5372,7 @@
               <a:buNone/>
             </a:pPr>
             <a:r>
-              <a:rPr lang="ar-SA" altLang="en-US" sz="4100" dirty="0">
+              <a:rPr lang="ar-SA" altLang="en-US" sz="3900" dirty="0">
                 <a:solidFill>
                   <a:srgbClr val="16213E"/>
                 </a:solidFill>
@@ -5380,13 +5380,13 @@
                 <a:ea typeface="Traditional Arabic" pitchFamily="34" charset="-122"/>
                 <a:cs typeface="Traditional Arabic" pitchFamily="34" charset="-120"/>
               </a:rPr>
-              <a:t>وَلَمۡ يَجۡعَل لَّهُۥ عِوَجَا </a:t>
+              <a:t>وَلَمۡ يَجۡعَل لَّهُۥ عِوَجَا</a:t>
             </a:r>
             <a:pPr algn="ctr" indent="0" marL="0">
               <a:buNone/>
             </a:pPr>
             <a:r>
-              <a:rPr lang="ar-SA" altLang="en-US" sz="2300" b="1" dirty="0">
+              <a:rPr lang="ar-SA" altLang="en-US" sz="3900" dirty="0">
                 <a:solidFill>
                   <a:srgbClr val="E03131"/>
                 </a:solidFill>
@@ -5394,13 +5394,13 @@
                 <a:ea typeface="Traditional Arabic" pitchFamily="34" charset="-122"/>
                 <a:cs typeface="Traditional Arabic" pitchFamily="34" charset="-120"/>
               </a:rPr>
-              <a:t> س </a:t>
+              <a:t>ۜ</a:t>
             </a:r>
             <a:pPr algn="ctr" indent="0" marL="0">
               <a:buNone/>
             </a:pPr>
             <a:r>
-              <a:rPr lang="ar-SA" altLang="en-US" sz="4100" dirty="0">
+              <a:rPr lang="ar-SA" altLang="en-US" sz="3900" dirty="0">
                 <a:solidFill>
                   <a:srgbClr val="16213E"/>
                 </a:solidFill>
@@ -5410,7 +5410,7 @@
               </a:rPr>
               <a:t> قَيِّمًا</a:t>
             </a:r>
-            <a:endParaRPr lang="ar-SA" sz="4100" dirty="0"/>
+            <a:endParaRPr lang="ar-SA" sz="3900" dirty="0"/>
           </a:p>
         </p:txBody>
       </p:sp>
@@ -15960,7 +15960,7 @@
         </p:nvSpPr>
         <p:spPr>
           <a:xfrm>
-            <a:off x="502920" y="3702304"/>
+            <a:off x="502920" y="3706368"/>
             <a:ext cx="8138160" cy="512064"/>
           </a:xfrm>
           <a:prstGeom prst="rect">
@@ -15977,7 +15977,7 @@
               <a:buNone/>
             </a:pPr>
             <a:r>
-              <a:rPr lang="en-US" sz="1900" dirty="0">
+              <a:rPr lang="en-US" sz="1500" dirty="0">
                 <a:solidFill>
                   <a:srgbClr val="16213E"/>
                 </a:solidFill>
@@ -15985,9 +15985,9 @@
                 <a:ea typeface="Arial" pitchFamily="34" charset="-122"/>
                 <a:cs typeface="Arial" pitchFamily="34" charset="-120"/>
               </a:rPr>
-              <a:t>The signs are small letters printed above the end of a word.</a:t>
+              <a:t>In the Mushaf these signs are printed small, ABOVE the last letter of the word.</a:t>
             </a:r>
-            <a:endParaRPr lang="en-US" sz="1900" dirty="0"/>
+            <a:endParaRPr lang="en-US" sz="1500" dirty="0"/>
           </a:p>
         </p:txBody>
       </p:sp>
@@ -27230,7 +27230,7 @@
         </p:nvSpPr>
         <p:spPr>
           <a:xfrm>
-            <a:off x="365760" y="1554646"/>
+            <a:off x="365760" y="1559922"/>
             <a:ext cx="8412480" cy="1417320"/>
           </a:xfrm>
           <a:prstGeom prst="rect">
@@ -27247,7 +27247,7 @@
               <a:buNone/>
             </a:pPr>
             <a:r>
-              <a:rPr lang="ar-SA" altLang="en-US" sz="3600" dirty="0">
+              <a:rPr lang="ar-SA" altLang="en-US" sz="3700" dirty="0">
                 <a:solidFill>
                   <a:srgbClr val="16213E"/>
                 </a:solidFill>
@@ -27255,13 +27255,13 @@
                 <a:ea typeface="Traditional Arabic" pitchFamily="34" charset="-122"/>
                 <a:cs typeface="Traditional Arabic" pitchFamily="34" charset="-120"/>
               </a:rPr>
-              <a:t>وَلَا يَحۡزُنكَ قَوۡلُهُمۡ </a:t>
+              <a:t>وَلَا يَحۡزُنكَ قَوۡلُهُمۡ</a:t>
             </a:r>
             <a:pPr algn="ctr" indent="0" marL="0">
               <a:buNone/>
             </a:pPr>
             <a:r>
-              <a:rPr lang="ar-SA" altLang="en-US" sz="2000" b="1" dirty="0">
+              <a:rPr lang="ar-SA" altLang="en-US" sz="3700" dirty="0">
                 <a:solidFill>
                   <a:srgbClr val="E03131"/>
                 </a:solidFill>
@@ -27269,13 +27269,13 @@
                 <a:ea typeface="Traditional Arabic" pitchFamily="34" charset="-122"/>
                 <a:cs typeface="Traditional Arabic" pitchFamily="34" charset="-120"/>
               </a:rPr>
-              <a:t> مـ </a:t>
+              <a:t>ۘ</a:t>
             </a:r>
             <a:pPr algn="ctr" indent="0" marL="0">
               <a:buNone/>
             </a:pPr>
             <a:r>
-              <a:rPr lang="ar-SA" altLang="en-US" sz="3600" dirty="0">
+              <a:rPr lang="ar-SA" altLang="en-US" sz="3700" dirty="0">
                 <a:solidFill>
                   <a:srgbClr val="16213E"/>
                 </a:solidFill>
@@ -27285,7 +27285,7 @@
               </a:rPr>
               <a:t> إِنَّ ٱلۡعِزَّةَ لِلَّهِ جَمِيعًا</a:t>
             </a:r>
-            <a:endParaRPr lang="ar-SA" sz="3600" dirty="0"/>
+            <a:endParaRPr lang="ar-SA" sz="3700" dirty="0"/>
           </a:p>
         </p:txBody>
       </p:sp>
@@ -35541,7 +35541,7 @@
         </p:nvSpPr>
         <p:spPr>
           <a:xfrm>
-            <a:off x="365760" y="1591621"/>
+            <a:off x="365760" y="1593533"/>
             <a:ext cx="8412480" cy="1417320"/>
           </a:xfrm>
           <a:prstGeom prst="rect">
@@ -35558,7 +35558,7 @@
               <a:buNone/>
             </a:pPr>
             <a:r>
-              <a:rPr lang="ar-SA" altLang="en-US" sz="2900" dirty="0">
+              <a:rPr lang="ar-SA" altLang="en-US" sz="3000" dirty="0">
                 <a:solidFill>
                   <a:srgbClr val="16213E"/>
                 </a:solidFill>
@@ -35566,13 +35566,13 @@
                 <a:ea typeface="Traditional Arabic" pitchFamily="34" charset="-122"/>
                 <a:cs typeface="Traditional Arabic" pitchFamily="34" charset="-120"/>
               </a:rPr>
-              <a:t>ٱلَّذِينَ تَتَوَفَّىٰهُمُ ٱلۡمَلَٰٓئِكَةُ طَيِّبِينَ </a:t>
+              <a:t>ٱلَّذِينَ تَتَوَفَّىٰهُمُ ٱلۡمَلَٰٓئِكَةُ طَيِّبِينَ</a:t>
             </a:r>
             <a:pPr algn="ctr" indent="0" marL="0">
               <a:buNone/>
             </a:pPr>
             <a:r>
-              <a:rPr lang="ar-SA" altLang="en-US" sz="1600" b="1" dirty="0">
+              <a:rPr lang="ar-SA" altLang="en-US" sz="3000" dirty="0">
                 <a:solidFill>
                   <a:srgbClr val="E03131"/>
                 </a:solidFill>
@@ -35580,13 +35580,13 @@
                 <a:ea typeface="Traditional Arabic" pitchFamily="34" charset="-122"/>
                 <a:cs typeface="Traditional Arabic" pitchFamily="34" charset="-120"/>
               </a:rPr>
-              <a:t> لا </a:t>
+              <a:t>ۙ</a:t>
             </a:r>
             <a:pPr algn="ctr" indent="0" marL="0">
               <a:buNone/>
             </a:pPr>
             <a:r>
-              <a:rPr lang="ar-SA" altLang="en-US" sz="2900" dirty="0">
+              <a:rPr lang="ar-SA" altLang="en-US" sz="3000" dirty="0">
                 <a:solidFill>
                   <a:srgbClr val="16213E"/>
                 </a:solidFill>
@@ -35596,7 +35596,7 @@
               </a:rPr>
               <a:t> يَقُولُونَ سَلَٰمٌ عَلَيۡكُمُ</a:t>
             </a:r>
-            <a:endParaRPr lang="ar-SA" sz="2900" dirty="0"/>
+            <a:endParaRPr lang="ar-SA" sz="3000" dirty="0"/>
           </a:p>
         </p:txBody>
       </p:sp>
@@ -36349,7 +36349,7 @@
         </p:nvSpPr>
         <p:spPr>
           <a:xfrm>
-            <a:off x="365760" y="1543702"/>
+            <a:off x="365760" y="1569872"/>
             <a:ext cx="8412480" cy="1417320"/>
           </a:xfrm>
           <a:prstGeom prst="rect">
@@ -36374,13 +36374,13 @@
                 <a:ea typeface="Traditional Arabic" pitchFamily="34" charset="-122"/>
                 <a:cs typeface="Traditional Arabic" pitchFamily="34" charset="-120"/>
               </a:rPr>
-              <a:t>نَّحۡنُ نَقُصُّ عَلَيۡكَ نَبَأَهُم بِٱلۡحَقِّ </a:t>
+              <a:t>نَّحۡنُ نَقُصُّ عَلَيۡكَ نَبَأَهُم بِٱلۡحَقِّ</a:t>
             </a:r>
             <a:pPr algn="ctr" indent="0" marL="0">
               <a:buNone/>
             </a:pPr>
             <a:r>
-              <a:rPr lang="ar-SA" altLang="en-US" sz="1300" b="1" dirty="0">
+              <a:rPr lang="ar-SA" altLang="en-US" sz="2400" dirty="0">
                 <a:solidFill>
                   <a:srgbClr val="E03131"/>
                 </a:solidFill>
@@ -36388,7 +36388,7 @@
                 <a:ea typeface="Traditional Arabic" pitchFamily="34" charset="-122"/>
                 <a:cs typeface="Traditional Arabic" pitchFamily="34" charset="-120"/>
               </a:rPr>
-              <a:t> ج </a:t>
+              <a:t>ۚ</a:t>
             </a:r>
             <a:pPr algn="ctr" indent="0" marL="0">
               <a:buNone/>
@@ -37347,7 +37347,7 @@
         </p:nvSpPr>
         <p:spPr>
           <a:xfrm>
-            <a:off x="365760" y="1542634"/>
+            <a:off x="365760" y="1569225"/>
             <a:ext cx="8412480" cy="1417320"/>
           </a:xfrm>
           <a:prstGeom prst="rect">
@@ -37364,7 +37364,7 @@
               <a:buNone/>
             </a:pPr>
             <a:r>
-              <a:rPr lang="ar-SA" altLang="en-US" sz="3100" dirty="0">
+              <a:rPr lang="ar-SA" altLang="en-US" sz="3400" dirty="0">
                 <a:solidFill>
                   <a:srgbClr val="16213E"/>
                 </a:solidFill>
@@ -37372,13 +37372,13 @@
                 <a:ea typeface="Traditional Arabic" pitchFamily="34" charset="-122"/>
                 <a:cs typeface="Traditional Arabic" pitchFamily="34" charset="-120"/>
               </a:rPr>
-              <a:t>فَلَا كَاشِفَ لَهُۥٓ إِلَّا هُوَ </a:t>
+              <a:t>فَلَا كَاشِفَ لَهُۥٓ إِلَّا هُوَ</a:t>
             </a:r>
             <a:pPr algn="ctr" indent="0" marL="0">
               <a:buNone/>
             </a:pPr>
             <a:r>
-              <a:rPr lang="ar-SA" altLang="en-US" sz="1700" b="1" dirty="0">
+              <a:rPr lang="ar-SA" altLang="en-US" sz="3400" dirty="0">
                 <a:solidFill>
                   <a:srgbClr val="E03131"/>
                 </a:solidFill>
@@ -37386,13 +37386,13 @@
                 <a:ea typeface="Traditional Arabic" pitchFamily="34" charset="-122"/>
                 <a:cs typeface="Traditional Arabic" pitchFamily="34" charset="-120"/>
               </a:rPr>
-              <a:t> صلى </a:t>
+              <a:t>ۖ</a:t>
             </a:r>
             <a:pPr algn="ctr" indent="0" marL="0">
               <a:buNone/>
             </a:pPr>
             <a:r>
-              <a:rPr lang="ar-SA" altLang="en-US" sz="3100" dirty="0">
+              <a:rPr lang="ar-SA" altLang="en-US" sz="3400" dirty="0">
                 <a:solidFill>
                   <a:srgbClr val="16213E"/>
                 </a:solidFill>
@@ -37402,7 +37402,7 @@
               </a:rPr>
               <a:t> وَإِن يَمۡسَسۡكَ بِخَيۡرٍ</a:t>
             </a:r>
-            <a:endParaRPr lang="ar-SA" sz="3100" dirty="0"/>
+            <a:endParaRPr lang="ar-SA" sz="3400" dirty="0"/>
           </a:p>
         </p:txBody>
       </p:sp>
@@ -38272,7 +38272,7 @@
         </p:nvSpPr>
         <p:spPr>
           <a:xfrm>
-            <a:off x="365760" y="1555159"/>
+            <a:off x="365760" y="1590465"/>
             <a:ext cx="8412480" cy="1417320"/>
           </a:xfrm>
           <a:prstGeom prst="rect">
@@ -38297,13 +38297,13 @@
                 <a:ea typeface="Traditional Arabic" pitchFamily="34" charset="-122"/>
                 <a:cs typeface="Traditional Arabic" pitchFamily="34" charset="-120"/>
               </a:rPr>
-              <a:t>مَّا يَعۡلَمُهُمۡ إِلَّا قَلِيلٌ </a:t>
+              <a:t>مَّا يَعۡلَمُهُمۡ إِلَّا قَلِيلٌ</a:t>
             </a:r>
             <a:pPr algn="ctr" indent="0" marL="0">
               <a:buNone/>
             </a:pPr>
             <a:r>
-              <a:rPr lang="ar-SA" altLang="en-US" sz="2000" b="1" dirty="0">
+              <a:rPr lang="ar-SA" altLang="en-US" sz="3700" dirty="0">
                 <a:solidFill>
                   <a:srgbClr val="E03131"/>
                 </a:solidFill>
@@ -38311,7 +38311,7 @@
                 <a:ea typeface="Traditional Arabic" pitchFamily="34" charset="-122"/>
                 <a:cs typeface="Traditional Arabic" pitchFamily="34" charset="-120"/>
               </a:rPr>
-              <a:t> قلى </a:t>
+              <a:t>ۗ</a:t>
             </a:r>
             <a:pPr algn="ctr" indent="0" marL="0">
               <a:buNone/>
@@ -39070,7 +39070,7 @@
         </p:nvSpPr>
         <p:spPr>
           <a:xfrm>
-            <a:off x="365760" y="1602423"/>
+            <a:off x="365760" y="1611376"/>
             <a:ext cx="8412480" cy="1417320"/>
           </a:xfrm>
           <a:prstGeom prst="rect">
@@ -39087,7 +39087,7 @@
               <a:buNone/>
             </a:pPr>
             <a:r>
-              <a:rPr lang="ar-SA" altLang="en-US" sz="3600" dirty="0">
+              <a:rPr lang="ar-SA" altLang="en-US" sz="3700" dirty="0">
                 <a:solidFill>
                   <a:srgbClr val="16213E"/>
                 </a:solidFill>
@@ -39095,13 +39095,13 @@
                 <a:ea typeface="Traditional Arabic" pitchFamily="34" charset="-122"/>
                 <a:cs typeface="Traditional Arabic" pitchFamily="34" charset="-120"/>
               </a:rPr>
-              <a:t>ذَٰلِكَ ٱلۡكِتَٰبُ لَا رَيۡبَ </a:t>
+              <a:t>ذَٰلِكَ ٱلۡكِتَٰبُ لَا رَيۡبَ</a:t>
             </a:r>
             <a:pPr algn="ctr" indent="0" marL="0">
               <a:buNone/>
             </a:pPr>
             <a:r>
-              <a:rPr lang="ar-SA" altLang="en-US" sz="2000" b="1" dirty="0">
+              <a:rPr lang="ar-SA" altLang="en-US" sz="3700" dirty="0">
                 <a:solidFill>
                   <a:srgbClr val="E03131"/>
                 </a:solidFill>
@@ -39109,13 +39109,13 @@
                 <a:ea typeface="Traditional Arabic" pitchFamily="34" charset="-122"/>
                 <a:cs typeface="Traditional Arabic" pitchFamily="34" charset="-120"/>
               </a:rPr>
-              <a:t> ∴ </a:t>
+              <a:t>ۛ</a:t>
             </a:r>
             <a:pPr algn="ctr" indent="0" marL="0">
               <a:buNone/>
             </a:pPr>
             <a:r>
-              <a:rPr lang="ar-SA" altLang="en-US" sz="3600" dirty="0">
+              <a:rPr lang="ar-SA" altLang="en-US" sz="3700" dirty="0">
                 <a:solidFill>
                   <a:srgbClr val="16213E"/>
                 </a:solidFill>
@@ -39123,13 +39123,13 @@
                 <a:ea typeface="Traditional Arabic" pitchFamily="34" charset="-122"/>
                 <a:cs typeface="Traditional Arabic" pitchFamily="34" charset="-120"/>
               </a:rPr>
-              <a:t> فِيهِ </a:t>
+              <a:t> فِيهِ</a:t>
             </a:r>
             <a:pPr algn="ctr" indent="0" marL="0">
               <a:buNone/>
             </a:pPr>
             <a:r>
-              <a:rPr lang="ar-SA" altLang="en-US" sz="2000" b="1" dirty="0">
+              <a:rPr lang="ar-SA" altLang="en-US" sz="3700" dirty="0">
                 <a:solidFill>
                   <a:srgbClr val="E03131"/>
                 </a:solidFill>
@@ -39137,13 +39137,13 @@
                 <a:ea typeface="Traditional Arabic" pitchFamily="34" charset="-122"/>
                 <a:cs typeface="Traditional Arabic" pitchFamily="34" charset="-120"/>
               </a:rPr>
-              <a:t> ∴ </a:t>
+              <a:t>ۛ</a:t>
             </a:r>
             <a:pPr algn="ctr" indent="0" marL="0">
               <a:buNone/>
             </a:pPr>
             <a:r>
-              <a:rPr lang="ar-SA" altLang="en-US" sz="3600" dirty="0">
+              <a:rPr lang="ar-SA" altLang="en-US" sz="3700" dirty="0">
                 <a:solidFill>
                   <a:srgbClr val="16213E"/>
                 </a:solidFill>
@@ -39153,7 +39153,7 @@
               </a:rPr>
               <a:t> هُدًى لِّلۡمُتَّقِينَ</a:t>
             </a:r>
-            <a:endParaRPr lang="ar-SA" sz="3600" dirty="0"/>
+            <a:endParaRPr lang="ar-SA" sz="3700" dirty="0"/>
           </a:p>
         </p:txBody>
       </p:sp>
@@ -39921,7 +39921,7 @@
         </p:nvSpPr>
         <p:spPr>
           <a:xfrm>
-            <a:off x="365760" y="1555853"/>
+            <a:off x="365760" y="1554010"/>
             <a:ext cx="8412480" cy="1417320"/>
           </a:xfrm>
           <a:prstGeom prst="rect">
@@ -39938,7 +39938,7 @@
               <a:buNone/>
             </a:pPr>
             <a:r>
-              <a:rPr lang="ar-SA" altLang="en-US" sz="3200" dirty="0">
+              <a:rPr lang="ar-SA" altLang="en-US" sz="2900" dirty="0">
                 <a:solidFill>
                   <a:srgbClr val="16213E"/>
                 </a:solidFill>
@@ -39952,7 +39952,7 @@
               <a:buNone/>
             </a:pPr>
             <a:r>
-              <a:rPr lang="ar-SA" altLang="en-US" sz="1800" b="1" dirty="0">
+              <a:rPr lang="ar-SA" altLang="en-US" sz="2900" dirty="0">
                 <a:solidFill>
                   <a:srgbClr val="E03131"/>
                 </a:solidFill>
@@ -39960,13 +39960,13 @@
                 <a:ea typeface="Traditional Arabic" pitchFamily="34" charset="-122"/>
                 <a:cs typeface="Traditional Arabic" pitchFamily="34" charset="-120"/>
               </a:rPr>
-              <a:t> 1 </a:t>
+              <a:t>﴿٢﴾</a:t>
             </a:r>
             <a:pPr algn="ctr" indent="0" marL="0">
               <a:buNone/>
             </a:pPr>
             <a:r>
-              <a:rPr lang="ar-SA" altLang="en-US" sz="3200" dirty="0">
+              <a:rPr lang="ar-SA" altLang="en-US" sz="2900" dirty="0">
                 <a:solidFill>
                   <a:srgbClr val="16213E"/>
                 </a:solidFill>
@@ -39980,7 +39980,7 @@
               <a:buNone/>
             </a:pPr>
             <a:r>
-              <a:rPr lang="ar-SA" altLang="en-US" sz="1800" b="1" dirty="0">
+              <a:rPr lang="ar-SA" altLang="en-US" sz="2900" dirty="0">
                 <a:solidFill>
                   <a:srgbClr val="E03131"/>
                 </a:solidFill>
@@ -39988,9 +39988,9 @@
                 <a:ea typeface="Traditional Arabic" pitchFamily="34" charset="-122"/>
                 <a:cs typeface="Traditional Arabic" pitchFamily="34" charset="-120"/>
               </a:rPr>
-              <a:t> 2 </a:t>
+              <a:t>﴿٣﴾</a:t>
             </a:r>
-            <a:endParaRPr lang="ar-SA" sz="3200" dirty="0"/>
+            <a:endParaRPr lang="ar-SA" sz="2900" dirty="0"/>
           </a:p>
         </p:txBody>
       </p:sp>

--- a/waqf/Stopping-Waqf.pptx
+++ b/waqf/Stopping-Waqf.pptx
@@ -4,6 +4,9 @@
   <p:sldMasterIdLst>
     <p:sldMasterId id="2147483648" r:id="rId1"/>
   </p:sldMasterIdLst>
+  <p:notesMasterIdLst>
+    <p:notesMasterId r:id="rId39"/>
+  </p:notesMasterIdLst>
   <p:sldIdLst>
     <p:sldId id="256" r:id="rId2"/>
     <p:sldId id="257" r:id="rId3"/>
@@ -43,9 +46,6 @@
     <p:sldId id="291" r:id="rId37"/>
     <p:sldId id="292" r:id="rId38"/>
   </p:sldIdLst>
-  <p:notesMasterIdLst>
-    <p:notesMasterId r:id="rId39"/>
-  </p:notesMasterIdLst>
   <p:sldSz cx="9144000" cy="5143500"/>
   <p:notesSz cx="5143500" cy="9144000"/>
   <p:defaultTextStyle>
@@ -5382,9 +5382,6 @@
               </a:rPr>
               <a:t>وَلَمۡ يَجۡعَل لَّهُۥ عِوَجَا</a:t>
             </a:r>
-            <a:pPr algn="ctr" indent="0" marL="0">
-              <a:buNone/>
-            </a:pPr>
             <a:r>
               <a:rPr lang="ar-SA" altLang="en-US" sz="3900" dirty="0">
                 <a:solidFill>
@@ -5396,9 +5393,6 @@
               </a:rPr>
               <a:t>ۜ</a:t>
             </a:r>
-            <a:pPr algn="ctr" indent="0" marL="0">
-              <a:buNone/>
-            </a:pPr>
             <a:r>
               <a:rPr lang="ar-SA" altLang="en-US" sz="3900" dirty="0">
                 <a:solidFill>
@@ -7284,9 +7278,6 @@
               </a:rPr>
               <a:t>...ٱلنَّا</a:t>
             </a:r>
-            <a:pPr algn="ctr" indent="0" marL="0">
-              <a:buNone/>
-            </a:pPr>
             <a:r>
               <a:rPr lang="ar-SA" altLang="en-US" sz="3600" dirty="0">
                 <a:solidFill>
@@ -8295,9 +8286,6 @@
               </a:rPr>
               <a:t>ٱلَّذِي خَلَ</a:t>
             </a:r>
-            <a:pPr algn="ctr" indent="0" marL="0">
-              <a:buNone/>
-            </a:pPr>
             <a:r>
               <a:rPr lang="ar-SA" altLang="en-US" sz="2700" dirty="0">
                 <a:solidFill>
@@ -9179,9 +9167,6 @@
               </a:rPr>
               <a:t>...أَحَ</a:t>
             </a:r>
-            <a:pPr algn="ctr" indent="0" marL="0">
-              <a:buNone/>
-            </a:pPr>
             <a:r>
               <a:rPr lang="ar-SA" altLang="en-US" sz="3300" dirty="0">
                 <a:solidFill>
@@ -10088,9 +10073,6 @@
               </a:rPr>
               <a:t>...خَوۡ</a:t>
             </a:r>
-            <a:pPr algn="ctr" indent="0" marL="0">
-              <a:buNone/>
-            </a:pPr>
             <a:r>
               <a:rPr lang="ar-SA" altLang="en-US" sz="3300" dirty="0">
                 <a:solidFill>
@@ -11022,9 +11004,6 @@
               </a:rPr>
               <a:t>...أَفۡوَاجَ</a:t>
             </a:r>
-            <a:pPr algn="ctr" indent="0" marL="0">
-              <a:buNone/>
-            </a:pPr>
             <a:r>
               <a:rPr lang="ar-SA" altLang="en-US" sz="3200" dirty="0">
                 <a:solidFill>
@@ -11916,9 +11895,6 @@
               </a:rPr>
               <a:t>...نِدَآءَ</a:t>
             </a:r>
-            <a:pPr algn="ctr" indent="0" marL="0">
-              <a:buNone/>
-            </a:pPr>
             <a:r>
               <a:rPr lang="ar-SA" altLang="en-US" sz="3800" dirty="0">
                 <a:solidFill>
@@ -13000,9 +12976,6 @@
               </a:rPr>
               <a:t>ٱلۡقَارِعَ</a:t>
             </a:r>
-            <a:pPr algn="ctr" indent="0" marL="0">
-              <a:buNone/>
-            </a:pPr>
             <a:r>
               <a:rPr lang="ar-SA" altLang="en-US" sz="3000" dirty="0">
                 <a:solidFill>
@@ -14011,9 +13984,6 @@
               </a:rPr>
               <a:t>...رَحۡمَ</a:t>
             </a:r>
-            <a:pPr algn="ctr" indent="0" marL="0">
-              <a:buNone/>
-            </a:pPr>
             <a:r>
               <a:rPr lang="ar-SA" altLang="en-US" sz="3800" dirty="0">
                 <a:solidFill>
@@ -17958,9 +17928,6 @@
               </a:rPr>
               <a:t>هُدَ</a:t>
             </a:r>
-            <a:pPr algn="ctr" indent="0" marL="0">
-              <a:buNone/>
-            </a:pPr>
             <a:r>
               <a:rPr lang="ar-SA" altLang="en-US" sz="4000" dirty="0">
                 <a:solidFill>
@@ -18867,9 +18834,6 @@
               </a:rPr>
               <a:t>خَيۡرًا يَرَ</a:t>
             </a:r>
-            <a:pPr algn="ctr" indent="0" marL="0">
-              <a:buNone/>
-            </a:pPr>
             <a:r>
               <a:rPr lang="ar-SA" altLang="en-US" sz="4000" dirty="0">
                 <a:solidFill>
@@ -19801,9 +19765,6 @@
               </a:rPr>
               <a:t>...رَبَّ</a:t>
             </a:r>
-            <a:pPr algn="ctr" indent="0" marL="0">
-              <a:buNone/>
-            </a:pPr>
             <a:r>
               <a:rPr lang="ar-SA" altLang="en-US" sz="3700" dirty="0">
                 <a:solidFill>
@@ -20695,9 +20656,6 @@
               </a:rPr>
               <a:t>وَٱسۡتَغۡفِرۡ</a:t>
             </a:r>
-            <a:pPr algn="ctr" indent="0" marL="0">
-              <a:buNone/>
-            </a:pPr>
             <a:r>
               <a:rPr lang="ar-SA" altLang="en-US" sz="3600" dirty="0">
                 <a:solidFill>
@@ -21779,9 +21737,6 @@
               </a:rPr>
               <a:t>...ٱلرَّحِ</a:t>
             </a:r>
-            <a:pPr algn="ctr" indent="0" marL="0">
-              <a:buNone/>
-            </a:pPr>
             <a:r>
               <a:rPr lang="ar-SA" altLang="en-US" sz="3300" dirty="0">
                 <a:solidFill>
@@ -21793,9 +21748,6 @@
               </a:rPr>
               <a:t>ي</a:t>
             </a:r>
-            <a:pPr algn="ctr" indent="0" marL="0">
-              <a:buNone/>
-            </a:pPr>
             <a:r>
               <a:rPr lang="ar-SA" altLang="en-US" sz="3300" dirty="0">
                 <a:solidFill>
@@ -22804,9 +22756,6 @@
               </a:rPr>
               <a:t>...قُرَ</a:t>
             </a:r>
-            <a:pPr algn="ctr" indent="0" marL="0">
-              <a:buNone/>
-            </a:pPr>
             <a:r>
               <a:rPr lang="ar-SA" altLang="en-US" sz="3300" dirty="0">
                 <a:solidFill>
@@ -22818,9 +22767,6 @@
               </a:rPr>
               <a:t>يۡ</a:t>
             </a:r>
-            <a:pPr algn="ctr" indent="0" marL="0">
-              <a:buNone/>
-            </a:pPr>
             <a:r>
               <a:rPr lang="ar-SA" altLang="en-US" sz="3300" dirty="0">
                 <a:solidFill>
@@ -23702,9 +23648,6 @@
               </a:rPr>
               <a:t>...خَلَ</a:t>
             </a:r>
-            <a:pPr algn="ctr" indent="0" marL="0">
-              <a:buNone/>
-            </a:pPr>
             <a:r>
               <a:rPr lang="ar-SA" altLang="en-US" sz="3500" dirty="0">
                 <a:solidFill>
@@ -24611,9 +24554,6 @@
               </a:rPr>
               <a:t>...وَتَ</a:t>
             </a:r>
-            <a:pPr algn="ctr" indent="0" marL="0">
-              <a:buNone/>
-            </a:pPr>
             <a:r>
               <a:rPr lang="ar-SA" altLang="en-US" sz="3800" dirty="0">
                 <a:solidFill>
@@ -25545,9 +25485,6 @@
               </a:rPr>
               <a:t>...مُسۡتَقَ</a:t>
             </a:r>
-            <a:pPr algn="ctr" indent="0" marL="0">
-              <a:buNone/>
-            </a:pPr>
             <a:r>
               <a:rPr lang="ar-SA" altLang="en-US" sz="3700" dirty="0">
                 <a:solidFill>
@@ -26439,9 +26376,6 @@
               </a:rPr>
               <a:t>وَٱلضُّحَ</a:t>
             </a:r>
-            <a:pPr algn="ctr" indent="0" marL="0">
-              <a:buNone/>
-            </a:pPr>
             <a:r>
               <a:rPr lang="ar-SA" altLang="en-US" sz="3200" dirty="0">
                 <a:solidFill>
@@ -27257,9 +27191,6 @@
               </a:rPr>
               <a:t>وَلَا يَحۡزُنكَ قَوۡلُهُمۡ</a:t>
             </a:r>
-            <a:pPr algn="ctr" indent="0" marL="0">
-              <a:buNone/>
-            </a:pPr>
             <a:r>
               <a:rPr lang="ar-SA" altLang="en-US" sz="3700" dirty="0">
                 <a:solidFill>
@@ -27271,9 +27202,6 @@
               </a:rPr>
               <a:t>ۘ</a:t>
             </a:r>
-            <a:pPr algn="ctr" indent="0" marL="0">
-              <a:buNone/>
-            </a:pPr>
             <a:r>
               <a:rPr lang="ar-SA" altLang="en-US" sz="3700" dirty="0">
                 <a:solidFill>
@@ -28346,9 +28274,6 @@
               </a:rPr>
               <a:t>أَنَ</a:t>
             </a:r>
-            <a:pPr algn="ctr" indent="0" marL="0">
-              <a:buNone/>
-            </a:pPr>
             <a:r>
               <a:rPr lang="ar-SA" altLang="en-US" sz="3700" dirty="0">
                 <a:solidFill>
@@ -30856,9 +30781,6 @@
               </a:rPr>
               <a:t>...حَامِيَ</a:t>
             </a:r>
-            <a:pPr algn="ctr" indent="0" marL="0">
-              <a:buNone/>
-            </a:pPr>
             <a:r>
               <a:rPr lang="ar-SA" altLang="en-US" sz="3900" dirty="0">
                 <a:solidFill>
@@ -31790,9 +31712,6 @@
               </a:rPr>
               <a:t>...حَكِيمَ</a:t>
             </a:r>
-            <a:pPr algn="ctr" indent="0" marL="0">
-              <a:buNone/>
-            </a:pPr>
             <a:r>
               <a:rPr lang="ar-SA" altLang="en-US" sz="4300" dirty="0">
                 <a:solidFill>
@@ -32684,9 +32603,6 @@
               </a:rPr>
               <a:t>...يَرَ</a:t>
             </a:r>
-            <a:pPr algn="ctr" indent="0" marL="0">
-              <a:buNone/>
-            </a:pPr>
             <a:r>
               <a:rPr lang="ar-SA" altLang="en-US" sz="4000" dirty="0">
                 <a:solidFill>
@@ -33768,9 +33684,6 @@
               </a:rPr>
               <a:t>...أَحَ</a:t>
             </a:r>
-            <a:pPr algn="ctr" indent="0" marL="0">
-              <a:buNone/>
-            </a:pPr>
             <a:r>
               <a:rPr lang="ar-SA" altLang="en-US" sz="3300" dirty="0">
                 <a:solidFill>
@@ -35568,9 +35481,6 @@
               </a:rPr>
               <a:t>ٱلَّذِينَ تَتَوَفَّىٰهُمُ ٱلۡمَلَٰٓئِكَةُ طَيِّبِينَ</a:t>
             </a:r>
-            <a:pPr algn="ctr" indent="0" marL="0">
-              <a:buNone/>
-            </a:pPr>
             <a:r>
               <a:rPr lang="ar-SA" altLang="en-US" sz="3000" dirty="0">
                 <a:solidFill>
@@ -35582,9 +35492,6 @@
               </a:rPr>
               <a:t>ۙ</a:t>
             </a:r>
-            <a:pPr algn="ctr" indent="0" marL="0">
-              <a:buNone/>
-            </a:pPr>
             <a:r>
               <a:rPr lang="ar-SA" altLang="en-US" sz="3000" dirty="0">
                 <a:solidFill>
@@ -36376,9 +36283,6 @@
               </a:rPr>
               <a:t>نَّحۡنُ نَقُصُّ عَلَيۡكَ نَبَأَهُم بِٱلۡحَقِّ</a:t>
             </a:r>
-            <a:pPr algn="ctr" indent="0" marL="0">
-              <a:buNone/>
-            </a:pPr>
             <a:r>
               <a:rPr lang="ar-SA" altLang="en-US" sz="2400" dirty="0">
                 <a:solidFill>
@@ -36390,9 +36294,6 @@
               </a:rPr>
               <a:t>ۚ</a:t>
             </a:r>
-            <a:pPr algn="ctr" indent="0" marL="0">
-              <a:buNone/>
-            </a:pPr>
             <a:r>
               <a:rPr lang="ar-SA" altLang="en-US" sz="2400" dirty="0">
                 <a:solidFill>
@@ -37374,9 +37275,6 @@
               </a:rPr>
               <a:t>فَلَا كَاشِفَ لَهُۥٓ إِلَّا هُوَ</a:t>
             </a:r>
-            <a:pPr algn="ctr" indent="0" marL="0">
-              <a:buNone/>
-            </a:pPr>
             <a:r>
               <a:rPr lang="ar-SA" altLang="en-US" sz="3400" dirty="0">
                 <a:solidFill>
@@ -37388,9 +37286,6 @@
               </a:rPr>
               <a:t>ۖ</a:t>
             </a:r>
-            <a:pPr algn="ctr" indent="0" marL="0">
-              <a:buNone/>
-            </a:pPr>
             <a:r>
               <a:rPr lang="ar-SA" altLang="en-US" sz="3400" dirty="0">
                 <a:solidFill>
@@ -38299,9 +38194,6 @@
               </a:rPr>
               <a:t>مَّا يَعۡلَمُهُمۡ إِلَّا قَلِيلٌ</a:t>
             </a:r>
-            <a:pPr algn="ctr" indent="0" marL="0">
-              <a:buNone/>
-            </a:pPr>
             <a:r>
               <a:rPr lang="ar-SA" altLang="en-US" sz="3700" dirty="0">
                 <a:solidFill>
@@ -38313,9 +38205,6 @@
               </a:rPr>
               <a:t>ۗ</a:t>
             </a:r>
-            <a:pPr algn="ctr" indent="0" marL="0">
-              <a:buNone/>
-            </a:pPr>
             <a:r>
               <a:rPr lang="ar-SA" altLang="en-US" sz="3700" dirty="0">
                 <a:solidFill>
@@ -39097,9 +38986,6 @@
               </a:rPr>
               <a:t>ذَٰلِكَ ٱلۡكِتَٰبُ لَا رَيۡبَ</a:t>
             </a:r>
-            <a:pPr algn="ctr" indent="0" marL="0">
-              <a:buNone/>
-            </a:pPr>
             <a:r>
               <a:rPr lang="ar-SA" altLang="en-US" sz="3700" dirty="0">
                 <a:solidFill>
@@ -39111,9 +38997,6 @@
               </a:rPr>
               <a:t>ۛ</a:t>
             </a:r>
-            <a:pPr algn="ctr" indent="0" marL="0">
-              <a:buNone/>
-            </a:pPr>
             <a:r>
               <a:rPr lang="ar-SA" altLang="en-US" sz="3700" dirty="0">
                 <a:solidFill>
@@ -39125,9 +39008,6 @@
               </a:rPr>
               <a:t> فِيهِ</a:t>
             </a:r>
-            <a:pPr algn="ctr" indent="0" marL="0">
-              <a:buNone/>
-            </a:pPr>
             <a:r>
               <a:rPr lang="ar-SA" altLang="en-US" sz="3700" dirty="0">
                 <a:solidFill>
@@ -39139,9 +39019,6 @@
               </a:rPr>
               <a:t>ۛ</a:t>
             </a:r>
-            <a:pPr algn="ctr" indent="0" marL="0">
-              <a:buNone/>
-            </a:pPr>
             <a:r>
               <a:rPr lang="ar-SA" altLang="en-US" sz="3700" dirty="0">
                 <a:solidFill>
@@ -39948,9 +39825,6 @@
               </a:rPr>
               <a:t>ٱلۡحَمۡدُ لِلَّهِ رَبِّ ٱلۡعَٰلَمِينَ </a:t>
             </a:r>
-            <a:pPr algn="ctr" indent="0" marL="0">
-              <a:buNone/>
-            </a:pPr>
             <a:r>
               <a:rPr lang="ar-SA" altLang="en-US" sz="2900" dirty="0">
                 <a:solidFill>
@@ -39962,9 +39836,6 @@
               </a:rPr>
               <a:t>﴿٢﴾</a:t>
             </a:r>
-            <a:pPr algn="ctr" indent="0" marL="0">
-              <a:buNone/>
-            </a:pPr>
             <a:r>
               <a:rPr lang="ar-SA" altLang="en-US" sz="2900" dirty="0">
                 <a:solidFill>
@@ -39976,9 +39847,6 @@
               </a:rPr>
               <a:t> ٱلرَّحۡمَٰنِ ٱلرَّحِيمِ </a:t>
             </a:r>
-            <a:pPr algn="ctr" indent="0" marL="0">
-              <a:buNone/>
-            </a:pPr>
             <a:r>
               <a:rPr lang="ar-SA" altLang="en-US" sz="2900" dirty="0">
                 <a:solidFill>
